--- a/plugins-dist/ppt-engine/raven_ppt/assets/templates/mint_memphis_thesis_defense.pptx
+++ b/plugins-dist/ppt-engine/raven_ppt/assets/templates/mint_memphis_thesis_defense.pptx
@@ -1975,10 +1975,6 @@
           </a:lstStyle>
           <a:p>
             <a:pPr lvl="0"/>
-            <a:r>
-              <a:rPr lang="zh-CN" altLang="en-US" dirty="0"/>
-              <a:t>www.islide.cc</a:t>
-            </a:r>
             <a:endParaRPr lang="en-US" dirty="0"/>
           </a:p>
         </p:txBody>
@@ -5001,10 +4997,6 @@
           <a:bodyPr/>
           <a:lstStyle/>
           <a:p>
-            <a:r>
-              <a:rPr lang="af-ZA" altLang="zh-CN"/>
-              <a:t>iSlide</a:t>
-            </a:r>
             <a:endParaRPr lang="zh-CN" altLang="en-US"/>
           </a:p>
         </p:txBody>
@@ -6882,10 +6874,6 @@
           </a:lstStyle>
           <a:p>
             <a:pPr lvl="0"/>
-            <a:r>
-              <a:rPr lang="zh-CN" altLang="en-US" dirty="0"/>
-              <a:t>www.islide.cc</a:t>
-            </a:r>
             <a:endParaRPr lang="en-US" dirty="0"/>
           </a:p>
         </p:txBody>
@@ -7146,7 +7134,7 @@
       </p:sp>
       <p:grpSp>
         <p:nvGrpSpPr>
-          <p:cNvPr id="8" name="组合 7" descr="本素材由iSlide™ 提供&#10;iSlide™尊重知识产权并注重保护用户享有的各项权利。郑重提醒您：&#10;iSlide™插件中提供的任何信息内容的所有权、知识产权归其原始权利人或权利受让人所有，您免费/购买获得的是信息内容的使用权，并受下述条款的约束；&#10;1. 您仅可以个人非商业用途使用该等信息内容，不可将信息内容的全部或部分用于出售，或以出租、出借、转让、分销、发布等其他任何方式供他人使用；&#10;2. 禁止在接入互联网或移动互联网的任何网站、平台、应用或程序上以任何方式为他人提供iSlide™插件资源内容的下载。&#10;The resource is supplied by iSlide™.&#10;iSlide™ respects all intellectual property rights and protects all the rights its users acquired.Solemnly remind you:&#10;The ownership and intellectual property of the resources supplied in iSlide Add-in belongs to its owner or the assignee of this ownership.you only acquired the usage of the resources supplied in iSlide Add-in, as well as respected the following restrain terms:&#10;1.You are only allowed to use such resource for personal and non-commercial aim, not allowed to use such resource or part of it for the sale; or rent, lend, transfer to others; or distribution or release it in any way.&#10;2.You are not permitted to provide the resource of iSlide Add-in in any website, platform, application access to the Internet or mobile Internet." title="iSlide™ 版权声明  COPYRIGHT NOTICE">
+          <p:cNvPr id="8" name="组合 7" descr="本素材由™ 提供&#10;™尊重知识产权并注重保护用户享有的各项权利。郑重提醒您：&#10;™插件中提供的任何信息内容的所有权、知识产权归其原始权利人或权利受让人所有，您免费/购买获得的是信息内容的使用权，并受下述条款的约束；&#10;1. 您仅可以个人非商业用途使用该等信息内容，不可将信息内容的全部或部分用于出售，或以出租、出借、转让、分销、发布等其他任何方式供他人使用；&#10;2. 禁止在接入互联网或移动互联网的任何网站、平台、应用或程序上以任何方式为他人提供™插件资源内容的下载。&#10;The resource is supplied by ™.&#10;™ respects all intellectual property rights and protects all the rights its users acquired.Solemnly remind you:&#10;The ownership and intellectual property of the resources supplied in  Add-in belongs to its owner or the assignee of this ownership.you only acquired the usage of the resources supplied in  Add-in, as well as respected the following restrain terms:&#10;1.You are only allowed to use such resource for personal and non-commercial aim, not allowed to use such resource or part of it for the sale; or rent, lend, transfer to others; or distribution or release it in any way.&#10;2.You are not permitted to provide the resource of  Add-in in any website, platform, application access to the Internet or mobile Internet." title="™ 版权声明  COPYRIGHT NOTICE">
             <a:extLst>
               <a:ext uri="{FF2B5EF4-FFF2-40B4-BE49-F238E27FC236}">
                 <a16:creationId xmlns:a16="http://schemas.microsoft.com/office/drawing/2014/main" id="{1006AD30-5893-56F6-7D68-15EB0F9E6E49}"/>
@@ -9006,7 +8994,7 @@
           <a:p>
             <a:r>
               <a:rPr lang="zh-CN" altLang="en-US" dirty="0"/>
-              <a:t>www.islide.cc</a:t>
+              <a:t>20XX.XX.XX</a:t>
             </a:r>
             <a:endParaRPr lang="en-US" dirty="0"/>
           </a:p>
@@ -32002,7 +31990,7 @@
           <a:p>
             <a:r>
               <a:rPr lang="zh-CN" altLang="en-US" dirty="0"/>
-              <a:t>www.islide.cc</a:t>
+              <a:t>20XX.XX.XX</a:t>
             </a:r>
             <a:endParaRPr lang="en-US" dirty="0"/>
           </a:p>
@@ -46077,15 +46065,13 @@
 </file>
 
 <file path=ppt/tags/tag1.xml><?xml version="1.0" encoding="utf-8"?>
-<p:tagLst xmlns:a="http://schemas.openxmlformats.org/drawingml/2006/main" xmlns:r="http://schemas.openxmlformats.org/officeDocument/2006/relationships" xmlns:p="http://schemas.openxmlformats.org/presentationml/2006/main">
-  <p:tag name="ISLIDE.GUIDESSETTING" val="{&quot;Id&quot;:&quot;GuidesStyle_Normal&quot;,&quot;Name&quot;:&quot;GuidesStyle_Normal&quot;,&quot;Kind&quot;:0,&quot;OldGuidesSetting&quot;:{&quot;HeaderHeight&quot;:15.0,&quot;FooterHeight&quot;:9.0,&quot;SideMargin&quot;:5.5,&quot;TopMargin&quot;:0.0,&quot;BottomMargin&quot;:0.0,&quot;IntervalMargin&quot;:1.5}}"/>
-</p:tagLst>
+<p:tagLst xmlns:a="http://schemas.openxmlformats.org/drawingml/2006/main" xmlns:r="http://schemas.openxmlformats.org/officeDocument/2006/relationships" xmlns:p="http://schemas.openxmlformats.org/presentationml/2006/main"/>
 </file>
 
 <file path=ppt/theme/theme1.xml><?xml version="1.0" encoding="utf-8"?>
-<a:theme xmlns:thm15="http://schemas.microsoft.com/office/thememl/2012/main" xmlns:a="http://schemas.openxmlformats.org/drawingml/2006/main" name="Designed by iSlide">
+<a:theme xmlns:thm15="http://schemas.microsoft.com/office/thememl/2012/main" xmlns:a="http://schemas.openxmlformats.org/drawingml/2006/main" name="Raven">
   <a:themeElements>
-    <a:clrScheme name="iSlide">
+    <a:clrScheme name="Raven">
       <a:dk1>
         <a:srgbClr val="2F2F2F"/>
       </a:dk1>
@@ -46123,7 +46109,7 @@
         <a:srgbClr val="979797"/>
       </a:folHlink>
     </a:clrScheme>
-    <a:fontScheme name="iSlide">
+    <a:fontScheme name="Raven">
       <a:majorFont>
         <a:latin typeface="Arial"/>
         <a:ea typeface="微软雅黑"/>
@@ -46135,7 +46121,7 @@
         <a:cs typeface=""/>
       </a:minorFont>
     </a:fontScheme>
-    <a:fmtScheme name="iSlide">
+    <a:fmtScheme name="Raven">
       <a:fillStyleLst>
         <a:solidFill>
           <a:schemeClr val="phClr"/>
@@ -46277,7 +46263,7 @@
   <a:extraClrSchemeLst/>
   <a:extLst>
     <a:ext uri="{05A4C25C-085E-4340-85A3-A5531E510DB2}">
-      <thm15:themeFamily xmlns:thm15="http://schemas.microsoft.com/office/thememl/2012/main" name="iSlide" id="{62F939B6-93AF-4DB8-9C6B-D6C7DFDC589F}" vid="{4A3C46E8-61CC-4603-A589-7422A47A8E4A}"/>
+      <thm15:themeFamily xmlns:thm15="http://schemas.microsoft.com/office/thememl/2012/main" name="Raven" id="{62F939B6-93AF-4DB8-9C6B-D6C7DFDC589F}" vid="{4A3C46E8-61CC-4603-A589-7422A47A8E4A}"/>
     </a:ext>
   </a:extLst>
 </a:theme>
@@ -46600,7 +46586,7 @@
 
 <file path=ppt/theme/themeOverride1.xml><?xml version="1.0" encoding="utf-8"?>
 <a:themeOverride xmlns:a="http://schemas.openxmlformats.org/drawingml/2006/main">
-  <a:clrScheme name="iSlide">
+  <a:clrScheme name="Raven">
     <a:dk1>
       <a:srgbClr val="2F2F2F"/>
     </a:dk1>
@@ -46643,7 +46629,7 @@
 
 <file path=ppt/theme/themeOverride2.xml><?xml version="1.0" encoding="utf-8"?>
 <a:themeOverride xmlns:a="http://schemas.openxmlformats.org/drawingml/2006/main">
-  <a:clrScheme name="iSlide">
+  <a:clrScheme name="Raven">
     <a:dk1>
       <a:srgbClr val="2F2F2F"/>
     </a:dk1>
@@ -46686,7 +46672,7 @@
 
 <file path=ppt/theme/themeOverride3.xml><?xml version="1.0" encoding="utf-8"?>
 <a:themeOverride xmlns:a="http://schemas.openxmlformats.org/drawingml/2006/main">
-  <a:clrScheme name="iSlide">
+  <a:clrScheme name="Raven">
     <a:dk1>
       <a:srgbClr val="2F2F2F"/>
     </a:dk1>
@@ -46729,7 +46715,7 @@
 
 <file path=ppt/theme/themeOverride4.xml><?xml version="1.0" encoding="utf-8"?>
 <a:themeOverride xmlns:a="http://schemas.openxmlformats.org/drawingml/2006/main">
-  <a:clrScheme name="iSlide">
+  <a:clrScheme name="Raven">
     <a:dk1>
       <a:srgbClr val="2F2F2F"/>
     </a:dk1>
@@ -46772,7 +46758,7 @@
 
 <file path=ppt/theme/themeOverride5.xml><?xml version="1.0" encoding="utf-8"?>
 <a:themeOverride xmlns:a="http://schemas.openxmlformats.org/drawingml/2006/main">
-  <a:clrScheme name="iSlide">
+  <a:clrScheme name="Raven">
     <a:dk1>
       <a:srgbClr val="2F2F2F"/>
     </a:dk1>
@@ -46815,7 +46801,7 @@
 
 <file path=ppt/theme/themeOverride6.xml><?xml version="1.0" encoding="utf-8"?>
 <a:themeOverride xmlns:a="http://schemas.openxmlformats.org/drawingml/2006/main">
-  <a:clrScheme name="iSlide">
+  <a:clrScheme name="Raven">
     <a:dk1>
       <a:srgbClr val="2F2F2F"/>
     </a:dk1>
@@ -46858,7 +46844,7 @@
 
 <file path=ppt/theme/themeOverride7.xml><?xml version="1.0" encoding="utf-8"?>
 <a:themeOverride xmlns:a="http://schemas.openxmlformats.org/drawingml/2006/main">
-  <a:clrScheme name="iSlide">
+  <a:clrScheme name="Raven">
     <a:dk1>
       <a:srgbClr val="2F2F2F"/>
     </a:dk1>
@@ -46901,7 +46887,7 @@
 
 <file path=ppt/theme/themeOverride8.xml><?xml version="1.0" encoding="utf-8"?>
 <a:themeOverride xmlns:a="http://schemas.openxmlformats.org/drawingml/2006/main">
-  <a:clrScheme name="iSlide">
+  <a:clrScheme name="Raven">
     <a:dk1>
       <a:srgbClr val="2F2F2F"/>
     </a:dk1>
